--- a/Презентация Flask-проект.pptx
+++ b/Презентация Flask-проект.pptx
@@ -15,7 +15,8 @@
     <p:sldId id="263" r:id="rId10"/>
     <p:sldId id="264" r:id="rId11"/>
     <p:sldId id="265" r:id="rId12"/>
-    <p:sldId id="266" r:id="rId13"/>
+    <p:sldId id="267" r:id="rId13"/>
+    <p:sldId id="266" r:id="rId14"/>
   </p:sldIdLst>
   <p:sldSz cx="9144000" cy="6858000" type="screen4x3"/>
   <p:notesSz cx="6858000" cy="9144000"/>
@@ -117,7 +118,7 @@
   <p:extLst>
     <p:ext uri="{EFAFB233-063F-42B5-8137-9DF3F51BA10A}">
       <p15:sldGuideLst xmlns:p15="http://schemas.microsoft.com/office/powerpoint/2012/main">
-        <p15:guide id="1" orient="horz" pos="2160" userDrawn="1">
+        <p15:guide id="1" orient="horz" pos="2157" userDrawn="1">
           <p15:clr>
             <a:srgbClr val="A4A3A4"/>
           </p15:clr>
@@ -3766,7 +3767,7 @@
         </p:nvSpPr>
         <p:spPr>
           <a:xfrm>
-            <a:off x="457200" y="253365"/>
+            <a:off x="457200" y="0"/>
             <a:ext cx="8229600" cy="952500"/>
           </a:xfrm>
         </p:spPr>
@@ -3804,6 +3805,149 @@
           </a:p>
         </p:txBody>
       </p:sp>
+      <p:sp>
+        <p:nvSpPr>
+          <p:cNvPr id="6" name="Текстовое поле 5"/>
+          <p:cNvSpPr txBox="1"/>
+          <p:nvPr/>
+        </p:nvSpPr>
+        <p:spPr>
+          <a:xfrm>
+            <a:off x="1475740" y="836930"/>
+            <a:ext cx="6765290" cy="368300"/>
+          </a:xfrm>
+          <a:prstGeom prst="rect">
+            <a:avLst/>
+          </a:prstGeom>
+          <a:noFill/>
+        </p:spPr>
+        <p:txBody>
+          <a:bodyPr wrap="square" rtlCol="0">
+            <a:spAutoFit/>
+          </a:bodyPr>
+          <a:p>
+            <a:r>
+              <a:rPr lang="ru-RU" altLang="en-US" b="1"/>
+              <a:t>Вход                                                            регистрация</a:t>
+            </a:r>
+            <a:endParaRPr lang="ru-RU" altLang="en-US" b="1"/>
+          </a:p>
+        </p:txBody>
+      </p:sp>
+      <p:pic>
+        <p:nvPicPr>
+          <p:cNvPr id="3" name="Изображение 2"/>
+          <p:cNvPicPr>
+            <a:picLocks noChangeAspect="1"/>
+          </p:cNvPicPr>
+          <p:nvPr/>
+        </p:nvPicPr>
+        <p:blipFill>
+          <a:blip r:embed="rId1"/>
+          <a:stretch>
+            <a:fillRect/>
+          </a:stretch>
+        </p:blipFill>
+        <p:spPr>
+          <a:xfrm>
+            <a:off x="179705" y="3573145"/>
+            <a:ext cx="4352925" cy="2221865"/>
+          </a:xfrm>
+          <a:prstGeom prst="rect">
+            <a:avLst/>
+          </a:prstGeom>
+        </p:spPr>
+      </p:pic>
+      <p:pic>
+        <p:nvPicPr>
+          <p:cNvPr id="8" name="Изображение 7"/>
+          <p:cNvPicPr>
+            <a:picLocks noChangeAspect="1"/>
+          </p:cNvPicPr>
+          <p:nvPr/>
+        </p:nvPicPr>
+        <p:blipFill>
+          <a:blip r:embed="rId2"/>
+          <a:stretch>
+            <a:fillRect/>
+          </a:stretch>
+        </p:blipFill>
+        <p:spPr>
+          <a:xfrm>
+            <a:off x="4827270" y="3644900"/>
+            <a:ext cx="4084955" cy="1962785"/>
+          </a:xfrm>
+          <a:prstGeom prst="rect">
+            <a:avLst/>
+          </a:prstGeom>
+        </p:spPr>
+      </p:pic>
+      <p:pic>
+        <p:nvPicPr>
+          <p:cNvPr id="9" name="Изображение 8"/>
+          <p:cNvPicPr>
+            <a:picLocks noChangeAspect="1"/>
+          </p:cNvPicPr>
+          <p:nvPr/>
+        </p:nvPicPr>
+        <p:blipFill>
+          <a:blip r:embed="rId3"/>
+          <a:stretch>
+            <a:fillRect/>
+          </a:stretch>
+        </p:blipFill>
+        <p:spPr>
+          <a:xfrm>
+            <a:off x="4817110" y="1124585"/>
+            <a:ext cx="4097655" cy="2261870"/>
+          </a:xfrm>
+          <a:prstGeom prst="rect">
+            <a:avLst/>
+          </a:prstGeom>
+        </p:spPr>
+      </p:pic>
+      <p:pic>
+        <p:nvPicPr>
+          <p:cNvPr id="10" name="Изображение 9"/>
+          <p:cNvPicPr>
+            <a:picLocks noChangeAspect="1"/>
+          </p:cNvPicPr>
+          <p:nvPr/>
+        </p:nvPicPr>
+        <p:blipFill>
+          <a:blip r:embed="rId4"/>
+          <a:stretch>
+            <a:fillRect/>
+          </a:stretch>
+        </p:blipFill>
+        <p:spPr>
+          <a:xfrm>
+            <a:off x="251460" y="1196975"/>
+            <a:ext cx="4513580" cy="2291080"/>
+          </a:xfrm>
+          <a:prstGeom prst="rect">
+            <a:avLst/>
+          </a:prstGeom>
+        </p:spPr>
+      </p:pic>
+    </p:spTree>
+  </p:cSld>
+  <p:clrMapOvr>
+    <a:masterClrMapping/>
+  </p:clrMapOvr>
+</p:sld>
+</file>
+
+<file path=ppt/slides/slide11.xml><?xml version="1.0" encoding="utf-8"?>
+<p:sld xmlns:a="http://schemas.openxmlformats.org/drawingml/2006/main" xmlns:r="http://schemas.openxmlformats.org/officeDocument/2006/relationships" xmlns:p="http://schemas.openxmlformats.org/presentationml/2006/main">
+  <p:cSld>
+    <p:spTree>
+      <p:nvGrpSpPr>
+        <p:cNvPr id="1" name=""/>
+        <p:cNvGrpSpPr/>
+        <p:nvPr/>
+      </p:nvGrpSpPr>
+      <p:grpSpPr/>
       <p:pic>
         <p:nvPicPr>
           <p:cNvPr id="4" name="Замещающее содержимое 3"/>
@@ -3822,8 +3966,8 @@
         </p:blipFill>
         <p:spPr>
           <a:xfrm>
-            <a:off x="179070" y="1340485"/>
-            <a:ext cx="4471035" cy="2424430"/>
+            <a:off x="107315" y="620395"/>
+            <a:ext cx="4039870" cy="2028825"/>
           </a:xfrm>
           <a:prstGeom prst="rect">
             <a:avLst/>
@@ -3832,7 +3976,7 @@
       </p:pic>
       <p:pic>
         <p:nvPicPr>
-          <p:cNvPr id="5" name="Изображение 4"/>
+          <p:cNvPr id="6" name="Изображение 5"/>
           <p:cNvPicPr>
             <a:picLocks noChangeAspect="1"/>
           </p:cNvPicPr>
@@ -3846,8 +3990,32 @@
         </p:blipFill>
         <p:spPr>
           <a:xfrm>
-            <a:off x="4716145" y="1369695"/>
-            <a:ext cx="4196080" cy="2395220"/>
+            <a:off x="179070" y="3500755"/>
+            <a:ext cx="5039995" cy="3018155"/>
+          </a:xfrm>
+          <a:prstGeom prst="rect">
+            <a:avLst/>
+          </a:prstGeom>
+        </p:spPr>
+      </p:pic>
+      <p:pic>
+        <p:nvPicPr>
+          <p:cNvPr id="7" name="Изображение 6"/>
+          <p:cNvPicPr>
+            <a:picLocks noChangeAspect="1"/>
+          </p:cNvPicPr>
+          <p:nvPr/>
+        </p:nvPicPr>
+        <p:blipFill>
+          <a:blip r:embed="rId3"/>
+          <a:stretch>
+            <a:fillRect/>
+          </a:stretch>
+        </p:blipFill>
+        <p:spPr>
+          <a:xfrm>
+            <a:off x="4211955" y="1557020"/>
+            <a:ext cx="4755515" cy="1896110"/>
           </a:xfrm>
           <a:prstGeom prst="rect">
             <a:avLst/>
@@ -3856,14 +4024,14 @@
       </p:pic>
       <p:sp>
         <p:nvSpPr>
-          <p:cNvPr id="6" name="Текстовое поле 5"/>
+          <p:cNvPr id="8" name="Текстовое поле 7"/>
           <p:cNvSpPr txBox="1"/>
           <p:nvPr/>
         </p:nvSpPr>
         <p:spPr>
           <a:xfrm>
-            <a:off x="1547495" y="1001395"/>
-            <a:ext cx="6765290" cy="368300"/>
+            <a:off x="4283710" y="116840"/>
+            <a:ext cx="4286250" cy="1938020"/>
           </a:xfrm>
           <a:prstGeom prst="rect">
             <a:avLst/>
@@ -3876,42 +4044,35 @@
           </a:bodyPr>
           <a:p>
             <a:r>
-              <a:rPr lang="ru-RU" altLang="en-US" b="1"/>
-              <a:t>Вход                                                            регистрация</a:t>
-            </a:r>
-            <a:endParaRPr lang="ru-RU" altLang="en-US" b="1"/>
-          </a:p>
-        </p:txBody>
-      </p:sp>
-      <p:sp>
-        <p:nvSpPr>
-          <p:cNvPr id="7" name="Текстовое поле 6"/>
-          <p:cNvSpPr txBox="1"/>
-          <p:nvPr/>
-        </p:nvSpPr>
-        <p:spPr>
-          <a:xfrm>
-            <a:off x="171450" y="4175125"/>
-            <a:ext cx="8720455" cy="1119505"/>
-          </a:xfrm>
-          <a:prstGeom prst="rect">
-            <a:avLst/>
-          </a:prstGeom>
-          <a:noFill/>
-        </p:spPr>
-        <p:txBody>
-          <a:bodyPr wrap="square" rtlCol="0">
-            <a:noAutofit/>
-          </a:bodyPr>
-          <a:p>
-            <a:r>
-              <a:rPr lang="en-US" altLang="en-US" sz="4000"/>
-              <a:t># </a:t>
-            </a:r>
-            <a:r>
-              <a:rPr lang="ru-RU" altLang="en-US" sz="4000"/>
-              <a:t>тут будут скрины меню профиля, главной и создания отзыва</a:t>
-            </a:r>
+              <a:rPr lang="en-US" altLang="en-US" sz="4000">
+                <a:latin typeface="Cambria" panose="02040503050406030204" pitchFamily="18" charset="0"/>
+                <a:cs typeface="Cambria" panose="02040503050406030204" pitchFamily="18" charset="0"/>
+                <a:sym typeface="+mn-ea"/>
+              </a:rPr>
+              <a:t>Демонстрация</a:t>
+            </a:r>
+            <a:r>
+              <a:rPr lang="en-US" altLang="ru-RU" sz="4000">
+                <a:latin typeface="Cambria" panose="02040503050406030204" pitchFamily="18" charset="0"/>
+                <a:cs typeface="Cambria" panose="02040503050406030204" pitchFamily="18" charset="0"/>
+                <a:sym typeface="+mn-ea"/>
+              </a:rPr>
+              <a:t> </a:t>
+            </a:r>
+            <a:r>
+              <a:rPr lang="en-US" altLang="en-US" sz="4000">
+                <a:latin typeface="Cambria" panose="02040503050406030204" pitchFamily="18" charset="0"/>
+                <a:cs typeface="Cambria" panose="02040503050406030204" pitchFamily="18" charset="0"/>
+                <a:sym typeface="+mn-ea"/>
+              </a:rPr>
+              <a:t>интерфейса</a:t>
+            </a:r>
+            <a:endParaRPr lang="en-US" altLang="en-US" sz="4000">
+              <a:latin typeface="Cambria" panose="02040503050406030204" pitchFamily="18" charset="0"/>
+              <a:cs typeface="Cambria" panose="02040503050406030204" pitchFamily="18" charset="0"/>
+            </a:endParaRPr>
+          </a:p>
+          <a:p>
             <a:endParaRPr lang="ru-RU" altLang="en-US" sz="4000"/>
           </a:p>
         </p:txBody>
@@ -3924,7 +4085,7 @@
 </p:sld>
 </file>
 
-<file path=ppt/slides/slide11.xml><?xml version="1.0" encoding="utf-8"?>
+<file path=ppt/slides/slide12.xml><?xml version="1.0" encoding="utf-8"?>
 <p:sld xmlns:a="http://schemas.openxmlformats.org/drawingml/2006/main" xmlns:r="http://schemas.openxmlformats.org/officeDocument/2006/relationships" xmlns:p="http://schemas.openxmlformats.org/presentationml/2006/main">
   <p:cSld>
     <p:spTree>
@@ -10126,35 +10287,32 @@
           </a:p>
         </p:txBody>
       </p:sp>
-      <p:sp>
-        <p:nvSpPr>
-          <p:cNvPr id="7" name="Замещающее содержимое 6"/>
-          <p:cNvSpPr>
-            <a:spLocks noGrp="1"/>
-          </p:cNvSpPr>
+      <p:pic>
+        <p:nvPicPr>
+          <p:cNvPr id="3" name="Замещающее содержимое 2"/>
+          <p:cNvPicPr>
+            <a:picLocks noChangeAspect="1"/>
+          </p:cNvPicPr>
           <p:nvPr>
             <p:ph idx="1"/>
           </p:nvPr>
-        </p:nvSpPr>
-        <p:spPr/>
-        <p:txBody>
-          <a:bodyPr/>
-          <a:p>
-            <a:pPr marL="0" indent="0">
-              <a:buNone/>
-            </a:pPr>
-            <a:r>
-              <a:rPr lang="en-US" altLang="ru-RU" sz="5400"/>
-              <a:t># </a:t>
-            </a:r>
-            <a:r>
-              <a:rPr lang="ru-RU" altLang="ru-RU" sz="5400"/>
-              <a:t>тут будет фото всей структуры детально</a:t>
-            </a:r>
-            <a:endParaRPr lang="ru-RU" altLang="ru-RU" sz="5400"/>
-          </a:p>
-        </p:txBody>
-      </p:sp>
+        </p:nvPicPr>
+        <p:blipFill>
+          <a:blip r:embed="rId1"/>
+          <a:stretch>
+            <a:fillRect/>
+          </a:stretch>
+        </p:blipFill>
+        <p:spPr>
+          <a:xfrm>
+            <a:off x="2432050" y="1645920"/>
+            <a:ext cx="4278630" cy="4526280"/>
+          </a:xfrm>
+          <a:prstGeom prst="rect">
+            <a:avLst/>
+          </a:prstGeom>
+        </p:spPr>
+      </p:pic>
     </p:spTree>
   </p:cSld>
   <p:clrMapOvr>
